--- a/COVID_SQL_PPT.pptx
+++ b/COVID_SQL_PPT.pptx
@@ -6906,16 +6906,13 @@
           <a:bodyPr wrap="square" rtlCol="0" anchor="ctr"/>
           <a:lstStyle/>
           <a:p>
-            <a:pPr marL="0" indent="0">
-              <a:buNone/>
-            </a:pPr>
             <a:r>
               <a:rPr lang="en-US" sz="1200" b="1" dirty="0">
                 <a:solidFill>
                   <a:srgbClr val="00B4D8"/>
                 </a:solidFill>
               </a:rPr>
-              <a:t>→  github.com/[ your-username ]/covid-sql-analysis</a:t>
+              <a:t>→  https://github.com/AnkitTopia/Covid-sql-analysis</a:t>
             </a:r>
             <a:endParaRPr lang="en-US" sz="1200" dirty="0"/>
           </a:p>
